--- a/src/Java/Collections/Collections.pptx
+++ b/src/Java/Collections/Collections.pptx
@@ -277,7 +277,7 @@
           <a:p>
             <a:fld id="{4CF31E54-3059-4937-AB82-58F2F2A12F5E}" type="datetimeFigureOut">
               <a:rPr lang="en-IN" smtClean="0"/>
-              <a:t>03-02-2026</a:t>
+              <a:t>14-02-2026</a:t>
             </a:fld>
             <a:endParaRPr lang="en-IN"/>
           </a:p>
@@ -477,7 +477,7 @@
           <a:p>
             <a:fld id="{4CF31E54-3059-4937-AB82-58F2F2A12F5E}" type="datetimeFigureOut">
               <a:rPr lang="en-IN" smtClean="0"/>
-              <a:t>03-02-2026</a:t>
+              <a:t>14-02-2026</a:t>
             </a:fld>
             <a:endParaRPr lang="en-IN"/>
           </a:p>
@@ -687,7 +687,7 @@
           <a:p>
             <a:fld id="{4CF31E54-3059-4937-AB82-58F2F2A12F5E}" type="datetimeFigureOut">
               <a:rPr lang="en-IN" smtClean="0"/>
-              <a:t>03-02-2026</a:t>
+              <a:t>14-02-2026</a:t>
             </a:fld>
             <a:endParaRPr lang="en-IN"/>
           </a:p>
@@ -887,7 +887,7 @@
           <a:p>
             <a:fld id="{4CF31E54-3059-4937-AB82-58F2F2A12F5E}" type="datetimeFigureOut">
               <a:rPr lang="en-IN" smtClean="0"/>
-              <a:t>03-02-2026</a:t>
+              <a:t>14-02-2026</a:t>
             </a:fld>
             <a:endParaRPr lang="en-IN"/>
           </a:p>
@@ -1163,7 +1163,7 @@
           <a:p>
             <a:fld id="{4CF31E54-3059-4937-AB82-58F2F2A12F5E}" type="datetimeFigureOut">
               <a:rPr lang="en-IN" smtClean="0"/>
-              <a:t>03-02-2026</a:t>
+              <a:t>14-02-2026</a:t>
             </a:fld>
             <a:endParaRPr lang="en-IN"/>
           </a:p>
@@ -1431,7 +1431,7 @@
           <a:p>
             <a:fld id="{4CF31E54-3059-4937-AB82-58F2F2A12F5E}" type="datetimeFigureOut">
               <a:rPr lang="en-IN" smtClean="0"/>
-              <a:t>03-02-2026</a:t>
+              <a:t>14-02-2026</a:t>
             </a:fld>
             <a:endParaRPr lang="en-IN"/>
           </a:p>
@@ -1846,7 +1846,7 @@
           <a:p>
             <a:fld id="{4CF31E54-3059-4937-AB82-58F2F2A12F5E}" type="datetimeFigureOut">
               <a:rPr lang="en-IN" smtClean="0"/>
-              <a:t>03-02-2026</a:t>
+              <a:t>14-02-2026</a:t>
             </a:fld>
             <a:endParaRPr lang="en-IN"/>
           </a:p>
@@ -1988,7 +1988,7 @@
           <a:p>
             <a:fld id="{4CF31E54-3059-4937-AB82-58F2F2A12F5E}" type="datetimeFigureOut">
               <a:rPr lang="en-IN" smtClean="0"/>
-              <a:t>03-02-2026</a:t>
+              <a:t>14-02-2026</a:t>
             </a:fld>
             <a:endParaRPr lang="en-IN"/>
           </a:p>
@@ -2101,7 +2101,7 @@
           <a:p>
             <a:fld id="{4CF31E54-3059-4937-AB82-58F2F2A12F5E}" type="datetimeFigureOut">
               <a:rPr lang="en-IN" smtClean="0"/>
-              <a:t>03-02-2026</a:t>
+              <a:t>14-02-2026</a:t>
             </a:fld>
             <a:endParaRPr lang="en-IN"/>
           </a:p>
@@ -2414,7 +2414,7 @@
           <a:p>
             <a:fld id="{4CF31E54-3059-4937-AB82-58F2F2A12F5E}" type="datetimeFigureOut">
               <a:rPr lang="en-IN" smtClean="0"/>
-              <a:t>03-02-2026</a:t>
+              <a:t>14-02-2026</a:t>
             </a:fld>
             <a:endParaRPr lang="en-IN"/>
           </a:p>
@@ -2703,7 +2703,7 @@
           <a:p>
             <a:fld id="{4CF31E54-3059-4937-AB82-58F2F2A12F5E}" type="datetimeFigureOut">
               <a:rPr lang="en-IN" smtClean="0"/>
-              <a:t>03-02-2026</a:t>
+              <a:t>14-02-2026</a:t>
             </a:fld>
             <a:endParaRPr lang="en-IN"/>
           </a:p>
@@ -2946,7 +2946,7 @@
           <a:p>
             <a:fld id="{4CF31E54-3059-4937-AB82-58F2F2A12F5E}" type="datetimeFigureOut">
               <a:rPr lang="en-IN" smtClean="0"/>
-              <a:t>03-02-2026</a:t>
+              <a:t>14-02-2026</a:t>
             </a:fld>
             <a:endParaRPr lang="en-IN"/>
           </a:p>
@@ -6422,7 +6422,7 @@
         </p:nvCxnSpPr>
         <p:spPr>
           <a:xfrm>
-            <a:off x="2623927" y="5184911"/>
+            <a:off x="2623927" y="5194850"/>
             <a:ext cx="3140764" cy="0"/>
           </a:xfrm>
           <a:prstGeom prst="line">
@@ -7259,7 +7259,15 @@
             </a:pPr>
             <a:r>
               <a:rPr lang="en-US" sz="1800" dirty="0"/>
-              <a:t>HashMap&lt;K, V&gt; do not allow duplicate keys and permit one null key along with multiple null values. And doesn’t guarantee order of the elements.</a:t>
+              <a:t>HashMap&lt;K, V&gt; do not allow duplicate keys and </a:t>
+            </a:r>
+            <a:r>
+              <a:rPr lang="en-US" sz="1800" b="1" dirty="0"/>
+              <a:t>permit one null key along with multiple null values</a:t>
+            </a:r>
+            <a:r>
+              <a:rPr lang="en-US" sz="1800" dirty="0"/>
+              <a:t>. And doesn’t guarantee order of the elements.</a:t>
             </a:r>
           </a:p>
           <a:p>
@@ -7333,7 +7341,15 @@
             </a:pPr>
             <a:r>
               <a:rPr lang="en-US" sz="1800" dirty="0"/>
-              <a:t>LinkedHashMap&lt;K, V&gt; doesn’t allow duplicate keys and permit one null key along with multiple null values.</a:t>
+              <a:t>LinkedHashMap&lt;K, V&gt; doesn’t allow duplicate keys and </a:t>
+            </a:r>
+            <a:r>
+              <a:rPr lang="en-US" sz="1800" b="1" dirty="0"/>
+              <a:t>permit one null key along with multiple null values</a:t>
+            </a:r>
+            <a:r>
+              <a:rPr lang="en-US" sz="1800" dirty="0"/>
+              <a:t>.</a:t>
             </a:r>
           </a:p>
           <a:p>
